--- a/Reporte 270826.pptx
+++ b/Reporte 270826.pptx
@@ -5,7 +5,7 @@
     <p:sldMasterId id="2147483672" r:id="rId1"/>
   </p:sldMasterIdLst>
   <p:notesMasterIdLst>
-    <p:notesMasterId r:id="rId20"/>
+    <p:notesMasterId r:id="rId19"/>
   </p:notesMasterIdLst>
   <p:sldIdLst>
     <p:sldId id="350" r:id="rId2"/>
@@ -24,23 +24,22 @@
     <p:sldId id="412" r:id="rId15"/>
     <p:sldId id="371" r:id="rId16"/>
     <p:sldId id="413" r:id="rId17"/>
-    <p:sldId id="416" r:id="rId18"/>
-    <p:sldId id="280" r:id="rId19"/>
+    <p:sldId id="280" r:id="rId18"/>
   </p:sldIdLst>
   <p:sldSz cx="9144000" cy="5143500" type="screen16x9"/>
   <p:notesSz cx="6858000" cy="9144000"/>
   <p:embeddedFontLst>
     <p:embeddedFont>
       <p:font typeface="Montserrat" panose="00000500000000000000" pitchFamily="2" charset="0"/>
-      <p:regular r:id="rId21"/>
-      <p:bold r:id="rId22"/>
-      <p:italic r:id="rId23"/>
-      <p:boldItalic r:id="rId24"/>
+      <p:regular r:id="rId20"/>
+      <p:bold r:id="rId21"/>
+      <p:italic r:id="rId22"/>
+      <p:boldItalic r:id="rId23"/>
     </p:embeddedFont>
     <p:embeddedFont>
       <p:font typeface="Montserrat Black" panose="00000A00000000000000" pitchFamily="2" charset="0"/>
-      <p:bold r:id="rId25"/>
-      <p:boldItalic r:id="rId26"/>
+      <p:bold r:id="rId24"/>
+      <p:boldItalic r:id="rId25"/>
     </p:embeddedFont>
   </p:embeddedFontLst>
   <p:defaultTextStyle>
@@ -6757,10 +6756,10 @@
       </p:sp>
       <p:pic>
         <p:nvPicPr>
-          <p:cNvPr id="5" name="Imagen 4">
+          <p:cNvPr id="4" name="Imagen 3">
             <a:extLst>
               <a:ext uri="{FF2B5EF4-FFF2-40B4-BE49-F238E27FC236}">
-                <a16:creationId xmlns:a16="http://schemas.microsoft.com/office/drawing/2014/main" id="{D55193C9-5F19-044E-1BD9-3FC8F4815747}"/>
+                <a16:creationId xmlns:a16="http://schemas.microsoft.com/office/drawing/2014/main" id="{F8C68752-8175-ED95-DFA7-60BEE92DDA51}"/>
               </a:ext>
             </a:extLst>
           </p:cNvPr>
@@ -6777,8 +6776,8 @@
         </p:blipFill>
         <p:spPr>
           <a:xfrm>
-            <a:off x="0" y="795158"/>
-            <a:ext cx="9144000" cy="3553184"/>
+            <a:off x="-6725" y="936342"/>
+            <a:ext cx="9144000" cy="3413692"/>
           </a:xfrm>
           <a:prstGeom prst="rect">
             <a:avLst/>
@@ -6863,10 +6862,10 @@
       </p:sp>
       <p:pic>
         <p:nvPicPr>
-          <p:cNvPr id="4" name="Imagen 3">
+          <p:cNvPr id="3" name="Imagen 2">
             <a:extLst>
               <a:ext uri="{FF2B5EF4-FFF2-40B4-BE49-F238E27FC236}">
-                <a16:creationId xmlns:a16="http://schemas.microsoft.com/office/drawing/2014/main" id="{4E41A316-0E32-A3C4-7A52-DA6BE9511AA6}"/>
+                <a16:creationId xmlns:a16="http://schemas.microsoft.com/office/drawing/2014/main" id="{33136EE3-B9F6-E64F-D4A0-2F81CB303B93}"/>
               </a:ext>
             </a:extLst>
           </p:cNvPr>
@@ -6883,8 +6882,8 @@
         </p:blipFill>
         <p:spPr>
           <a:xfrm>
-            <a:off x="0" y="1334720"/>
-            <a:ext cx="9144000" cy="2616935"/>
+            <a:off x="0" y="1348126"/>
+            <a:ext cx="9144000" cy="2590124"/>
           </a:xfrm>
           <a:prstGeom prst="rect">
             <a:avLst/>
@@ -6969,10 +6968,10 @@
       </p:sp>
       <p:pic>
         <p:nvPicPr>
-          <p:cNvPr id="4" name="Imagen 3">
+          <p:cNvPr id="5" name="Imagen 4">
             <a:extLst>
               <a:ext uri="{FF2B5EF4-FFF2-40B4-BE49-F238E27FC236}">
-                <a16:creationId xmlns:a16="http://schemas.microsoft.com/office/drawing/2014/main" id="{64549E9E-7E2C-7572-2EF1-F9AA79FB5582}"/>
+                <a16:creationId xmlns:a16="http://schemas.microsoft.com/office/drawing/2014/main" id="{DDA6DEC5-8FF2-3F41-44FF-D6B472B16D61}"/>
               </a:ext>
             </a:extLst>
           </p:cNvPr>
@@ -6989,8 +6988,8 @@
         </p:blipFill>
         <p:spPr>
           <a:xfrm>
-            <a:off x="0" y="768830"/>
-            <a:ext cx="9144000" cy="3748715"/>
+            <a:off x="0" y="814388"/>
+            <a:ext cx="9144000" cy="3657600"/>
           </a:xfrm>
           <a:prstGeom prst="rect">
             <a:avLst/>
@@ -7075,10 +7074,10 @@
       </p:sp>
       <p:pic>
         <p:nvPicPr>
-          <p:cNvPr id="4" name="Imagen 3">
+          <p:cNvPr id="3" name="Imagen 2">
             <a:extLst>
               <a:ext uri="{FF2B5EF4-FFF2-40B4-BE49-F238E27FC236}">
-                <a16:creationId xmlns:a16="http://schemas.microsoft.com/office/drawing/2014/main" id="{1F04F55A-A4A6-C115-23C4-C768F7E2AEFC}"/>
+                <a16:creationId xmlns:a16="http://schemas.microsoft.com/office/drawing/2014/main" id="{F3666358-6D22-E7F6-EC3F-150CE9B4EB27}"/>
               </a:ext>
             </a:extLst>
           </p:cNvPr>
@@ -7095,8 +7094,8 @@
         </p:blipFill>
         <p:spPr>
           <a:xfrm>
-            <a:off x="0" y="1275884"/>
-            <a:ext cx="9144000" cy="2734607"/>
+            <a:off x="0" y="1357550"/>
+            <a:ext cx="9144000" cy="2571275"/>
           </a:xfrm>
           <a:prstGeom prst="rect">
             <a:avLst/>
@@ -7181,10 +7180,10 @@
       </p:sp>
       <p:pic>
         <p:nvPicPr>
-          <p:cNvPr id="4" name="Imagen 3">
+          <p:cNvPr id="3" name="Imagen 2">
             <a:extLst>
               <a:ext uri="{FF2B5EF4-FFF2-40B4-BE49-F238E27FC236}">
-                <a16:creationId xmlns:a16="http://schemas.microsoft.com/office/drawing/2014/main" id="{ED5B1473-E361-77F2-9051-DA9F66692294}"/>
+                <a16:creationId xmlns:a16="http://schemas.microsoft.com/office/drawing/2014/main" id="{B48BE04A-9422-B471-A10A-B2101697ABE0}"/>
               </a:ext>
             </a:extLst>
           </p:cNvPr>
@@ -7201,8 +7200,8 @@
         </p:blipFill>
         <p:spPr>
           <a:xfrm>
-            <a:off x="0" y="617773"/>
-            <a:ext cx="9144000" cy="3907953"/>
+            <a:off x="0" y="1711525"/>
+            <a:ext cx="9144000" cy="1863325"/>
           </a:xfrm>
           <a:prstGeom prst="rect">
             <a:avLst/>
@@ -7293,10 +7292,10 @@
       </p:sp>
       <p:pic>
         <p:nvPicPr>
-          <p:cNvPr id="3" name="Imagen 2">
+          <p:cNvPr id="4" name="Imagen 3">
             <a:extLst>
               <a:ext uri="{FF2B5EF4-FFF2-40B4-BE49-F238E27FC236}">
-                <a16:creationId xmlns:a16="http://schemas.microsoft.com/office/drawing/2014/main" id="{84672662-FB0F-0527-E44A-2ABD8ACEAE49}"/>
+                <a16:creationId xmlns:a16="http://schemas.microsoft.com/office/drawing/2014/main" id="{13685110-AB8B-8D19-005E-1469AB4FFDF8}"/>
               </a:ext>
             </a:extLst>
           </p:cNvPr>
@@ -7313,8 +7312,8 @@
         </p:blipFill>
         <p:spPr>
           <a:xfrm>
-            <a:off x="0" y="1452141"/>
-            <a:ext cx="9144000" cy="2382093"/>
+            <a:off x="0" y="1577325"/>
+            <a:ext cx="9144000" cy="1988849"/>
           </a:xfrm>
           <a:prstGeom prst="rect">
             <a:avLst/>
@@ -7335,118 +7334,6 @@
 </file>
 
 <file path=ppt/slides/slide17.xml><?xml version="1.0" encoding="utf-8"?>
-<p:sld xmlns:a="http://schemas.openxmlformats.org/drawingml/2006/main" xmlns:r="http://schemas.openxmlformats.org/officeDocument/2006/relationships" xmlns:p="http://schemas.openxmlformats.org/presentationml/2006/main">
-  <p:cSld>
-    <p:bg>
-      <p:bgPr>
-        <a:solidFill>
-          <a:srgbClr val="F8F9FA"/>
-        </a:solidFill>
-        <a:effectLst/>
-      </p:bgPr>
-    </p:bg>
-    <p:spTree>
-      <p:nvGrpSpPr>
-        <p:cNvPr id="1" name="">
-          <a:extLst>
-            <a:ext uri="{FF2B5EF4-FFF2-40B4-BE49-F238E27FC236}">
-              <a16:creationId xmlns:a16="http://schemas.microsoft.com/office/drawing/2014/main" id="{87966D19-114C-A6F3-AD60-EA7522CD0637}"/>
-            </a:ext>
-          </a:extLst>
-        </p:cNvPr>
-        <p:cNvGrpSpPr/>
-        <p:nvPr/>
-      </p:nvGrpSpPr>
-      <p:grpSpPr>
-        <a:xfrm>
-          <a:off x="0" y="0"/>
-          <a:ext cx="0" cy="0"/>
-          <a:chOff x="0" y="0"/>
-          <a:chExt cx="0" cy="0"/>
-        </a:xfrm>
-      </p:grpSpPr>
-      <p:sp>
-        <p:nvSpPr>
-          <p:cNvPr id="5" name="CuadroTexto 4">
-            <a:extLst>
-              <a:ext uri="{FF2B5EF4-FFF2-40B4-BE49-F238E27FC236}">
-                <a16:creationId xmlns:a16="http://schemas.microsoft.com/office/drawing/2014/main" id="{8C2D92B3-FE6E-B338-3B95-6C582961E1DF}"/>
-              </a:ext>
-            </a:extLst>
-          </p:cNvPr>
-          <p:cNvSpPr txBox="1"/>
-          <p:nvPr/>
-        </p:nvSpPr>
-        <p:spPr>
-          <a:xfrm>
-            <a:off x="1926166" y="88135"/>
-            <a:ext cx="5291667" cy="307777"/>
-          </a:xfrm>
-          <a:prstGeom prst="rect">
-            <a:avLst/>
-          </a:prstGeom>
-          <a:noFill/>
-        </p:spPr>
-        <p:txBody>
-          <a:bodyPr wrap="square" rtlCol="0">
-            <a:spAutoFit/>
-          </a:bodyPr>
-          <a:lstStyle/>
-          <a:p>
-            <a:pPr algn="ctr"/>
-            <a:r>
-              <a:rPr lang="es-MX" b="1" dirty="0">
-                <a:latin typeface="Montserrat" pitchFamily="2" charset="0"/>
-              </a:rPr>
-              <a:t>Opinión emitida por radioescuchas</a:t>
-            </a:r>
-          </a:p>
-        </p:txBody>
-      </p:sp>
-      <p:pic>
-        <p:nvPicPr>
-          <p:cNvPr id="4" name="Imagen 3">
-            <a:extLst>
-              <a:ext uri="{FF2B5EF4-FFF2-40B4-BE49-F238E27FC236}">
-                <a16:creationId xmlns:a16="http://schemas.microsoft.com/office/drawing/2014/main" id="{69CCBEEF-24C0-1866-E429-331486407D7D}"/>
-              </a:ext>
-            </a:extLst>
-          </p:cNvPr>
-          <p:cNvPicPr>
-            <a:picLocks noChangeAspect="1"/>
-          </p:cNvPicPr>
-          <p:nvPr/>
-        </p:nvPicPr>
-        <p:blipFill>
-          <a:blip r:embed="rId2"/>
-          <a:stretch>
-            <a:fillRect/>
-          </a:stretch>
-        </p:blipFill>
-        <p:spPr>
-          <a:xfrm>
-            <a:off x="753535" y="1166607"/>
-            <a:ext cx="7563906" cy="2953162"/>
-          </a:xfrm>
-          <a:prstGeom prst="rect">
-            <a:avLst/>
-          </a:prstGeom>
-        </p:spPr>
-      </p:pic>
-    </p:spTree>
-    <p:extLst>
-      <p:ext uri="{BB962C8B-B14F-4D97-AF65-F5344CB8AC3E}">
-        <p14:creationId xmlns:p14="http://schemas.microsoft.com/office/powerpoint/2010/main" val="1931692817"/>
-      </p:ext>
-    </p:extLst>
-  </p:cSld>
-  <p:clrMapOvr>
-    <a:masterClrMapping/>
-  </p:clrMapOvr>
-</p:sld>
-</file>
-
-<file path=ppt/slides/slide18.xml><?xml version="1.0" encoding="utf-8"?>
 <p:sld xmlns:a="http://schemas.openxmlformats.org/drawingml/2006/main" xmlns:r="http://schemas.openxmlformats.org/officeDocument/2006/relationships" xmlns:p="http://schemas.openxmlformats.org/presentationml/2006/main">
   <p:cSld>
     <p:spTree>
